--- a/deck/Ultimate-Guide-Browser-AI-2026.pptx
+++ b/deck/Ultimate-Guide-Browser-AI-2026.pptx
@@ -19753,7 +19753,7 @@
                 <a:latin typeface="Arial"/>
                 <a:hlinkClick r:id="rId4"/>
               </a:rPr>
-              <a:t>webai-playground.sites.tab.bot</a:t>
+              <a:t>webai.isainative.dev</a:t>
             </a:r>
           </a:p>
         </p:txBody>
@@ -26574,7 +26574,7 @@
                 <a:latin typeface="Arial"/>
                 <a:hlinkClick r:id="rId3"/>
               </a:rPr>
-              <a:t>webai-playground.sites.tab.bot</a:t>
+              <a:t>webai.isainative.dev</a:t>
             </a:r>
           </a:p>
         </p:txBody>
@@ -30022,7 +30022,7 @@
                 <a:latin typeface="Arial"/>
                 <a:hlinkClick r:id="rId4"/>
               </a:rPr>
-              <a:t>webai-playground.sites.tab.bot</a:t>
+              <a:t>webai.isainative.dev</a:t>
             </a:r>
           </a:p>
         </p:txBody>
@@ -37018,7 +37018,7 @@
                 <a:latin typeface="Arial"/>
                 <a:hlinkClick r:id="rId4"/>
               </a:rPr>
-              <a:t>webai-playground.sites.tab.bot</a:t>
+              <a:t>webai.isainative.dev</a:t>
             </a:r>
           </a:p>
         </p:txBody>
